--- a/dist/초5/국어/문학문법매체/초5_국어_문학문법매체_01_인물·사건·배경_학생용.pptx
+++ b/dist/초5/국어/문학문법매체/초5_국어_문학문법매체_01_인물·사건·배경_학생용.pptx
@@ -120,13 +120,13 @@
   <p:extLst>
     <p:ext uri="{521415D9-36F7-43E2-AB2F-B90AF26B5E84}">
       <p14:sectionLst xmlns:p14="http://schemas.microsoft.com/office/powerpoint/2010/main">
-        <p14:section name="도입" id="{965fb0eb-d32c-9d03-1bbb-951d2af8f03d}">
+        <p14:section name="도입" id="{be0744ce-90de-476b-25ac-396adb16ed7b}">
           <p14:sldIdLst>
             <p14:sldId id="256"/>
             <p14:sldId id="257"/>
           </p14:sldIdLst>
         </p14:section>
-        <p14:section name="개념" id="{ca376165-15ef-12f4-95b7-b98b07219d24}">
+        <p14:section name="개념" id="{d79ff8d1-f2b4-27f1-a814-0f686fa625e2}">
           <p14:sldIdLst>
             <p14:sldId id="258"/>
             <p14:sldId id="259"/>
@@ -135,25 +135,25 @@
             <p14:sldId id="262"/>
           </p14:sldIdLst>
         </p14:section>
-        <p14:section name="연습" id="{d32c0737-dd80-d170-409b-11462310911a}">
+        <p14:section name="연습" id="{69cf2a60-cd33-7c7b-e1b7-4077b61c1d05}">
           <p14:sldIdLst>
             <p14:sldId id="263"/>
             <p14:sldId id="264"/>
             <p14:sldId id="265"/>
           </p14:sldIdLst>
         </p14:section>
-        <p14:section name="확인" id="{2758d197-746d-96f1-4325-a00787919bc2}">
+        <p14:section name="확인" id="{756de7be-e361-1647-994a-b66e04141b70}">
           <p14:sldIdLst>
             <p14:sldId id="266"/>
             <p14:sldId id="267"/>
           </p14:sldIdLst>
         </p14:section>
-        <p14:section name="정리" id="{3ce4ed29-b5c7-d51c-116f-7b9283891f67}">
+        <p14:section name="정리" id="{52b551e5-a378-f4bc-b52f-78909d528be8}">
           <p14:sldIdLst>
             <p14:sldId id="268"/>
           </p14:sldIdLst>
         </p14:section>
-        <p14:section name="보충" id="{5a60578c-55ea-a8bd-d38b-da24344e9780}">
+        <p14:section name="보충" id="{28fa3cda-3f4c-e44f-f452-b42b644287ac}">
           <p14:sldIdLst>
             <p14:sldId id="269"/>
           </p14:sldIdLst>
@@ -7046,7 +7046,7 @@
           </p:nvPr>
         </p:nvGraphicFramePr>
         <p:xfrm>
-          <a:off x="608076" y="1569720"/>
+          <a:off x="608076" y="1537716"/>
           <a:ext cx="10972800" cy="914400"/>
         </p:xfrm>
         <a:graphic>
@@ -7057,7 +7057,7 @@
                 <a:gridCol w="2194560"/>
                 <a:gridCol w="8778240"/>
               </a:tblGrid>
-              <a:tr h="472440">
+              <a:tr h="481584">
                 <a:tc>
                   <a:txBody>
                     <a:bodyPr/>
@@ -7195,7 +7195,7 @@
                   </a:tcPr>
                 </a:tc>
               </a:tr>
-              <a:tr h="472440">
+              <a:tr h="481584">
                 <a:tc>
                   <a:txBody>
                     <a:bodyPr/>
@@ -7333,7 +7333,7 @@
                   </a:tcPr>
                 </a:tc>
               </a:tr>
-              <a:tr h="472440">
+              <a:tr h="481584">
                 <a:tc>
                   <a:txBody>
                     <a:bodyPr/>
@@ -7471,7 +7471,7 @@
                   </a:tcPr>
                 </a:tc>
               </a:tr>
-              <a:tr h="472440">
+              <a:tr h="481584">
                 <a:tc>
                   <a:txBody>
                     <a:bodyPr/>
@@ -7609,7 +7609,7 @@
                   </a:tcPr>
                 </a:tc>
               </a:tr>
-              <a:tr h="472440">
+              <a:tr h="481584">
                 <a:tc>
                   <a:txBody>
                     <a:bodyPr/>
@@ -7747,7 +7747,7 @@
                   </a:tcPr>
                 </a:tc>
               </a:tr>
-              <a:tr h="472440">
+              <a:tr h="481584">
                 <a:tc>
                   <a:txBody>
                     <a:bodyPr/>
@@ -7885,7 +7885,7 @@
                   </a:tcPr>
                 </a:tc>
               </a:tr>
-              <a:tr h="472440">
+              <a:tr h="481584">
                 <a:tc>
                   <a:txBody>
                     <a:bodyPr/>
